--- a/CIS_FIN_Project_Overview.pptx
+++ b/CIS_FIN_Project_Overview.pptx
@@ -1,7 +1,9 @@
 
 <file path=ppt/presentation.xml><?xml version="1.0" encoding="utf-8"?>
 <p:presentation xmlns:a="http://schemas.openxmlformats.org/drawingml/2006/main" xmlns:p="http://schemas.openxmlformats.org/presentationml/2006/main" xmlns:r="http://schemas.openxmlformats.org/officeDocument/2006/relationships">
-  <p:sldMasterIdLst/>
+  <p:sldMasterIdLst>
+    <p:sldMasterId id="2147483648" r:id="rId13"/>
+  </p:sldMasterIdLst>
   <p:sldIdLst>
     <p:sldId id="255" r:id="rId1"/>
     <p:sldId id="256" r:id="rId2"/>
@@ -21,6 +23,38 @@
 </p:presentation>
 </file>
 
+<file path=ppt/slideLayouts/slideLayout1.xml><?xml version="1.0" encoding="utf-8"?>
+<p:sldLayout xmlns:a="http://schemas.openxmlformats.org/drawingml/2006/main" xmlns:p="http://schemas.openxmlformats.org/presentationml/2006/main" xmlns:r="http://schemas.openxmlformats.org/officeDocument/2006/relationships" type="blank">
+  <p:cSld name="Blank">
+    <p:spTree>
+      <p:nvGrpSpPr>
+        <p:cNvPr id="1" name=""/>
+        <p:cNvGrpSpPr/>
+        <p:nvPr/>
+      </p:nvGrpSpPr>
+    </p:spTree>
+  </p:cSld>
+</p:sldLayout>
+</file>
+
+<file path=ppt/slideMasters/slideMaster1.xml><?xml version="1.0" encoding="utf-8"?>
+<p:sldMaster xmlns:a="http://schemas.openxmlformats.org/drawingml/2006/main" xmlns:p="http://schemas.openxmlformats.org/presentationml/2006/main" xmlns:r="http://schemas.openxmlformats.org/officeDocument/2006/relationships">
+  <p:cSld>
+    <p:spTree>
+      <p:nvGrpSpPr>
+        <p:cNvPr id="1" name=""/>
+        <p:cNvGrpSpPr/>
+        <p:nvPr/>
+      </p:nvGrpSpPr>
+    </p:spTree>
+  </p:cSld>
+  <p:sldLayoutIdLst>
+    <p:sldLayoutId id="1" r:id="rId1"/>
+  </p:sldLayoutIdLst>
+  <p:txStyles/>
+</p:sldMaster>
+</file>
+
 <file path=ppt/slides/slide1.xml><?xml version="1.0" encoding="utf-8"?>
 <p:sld xmlns:a="http://schemas.openxmlformats.org/drawingml/2006/main" xmlns:p="http://schemas.openxmlformats.org/presentationml/2006/main">
   <p:cSld>
@@ -2440,4 +2474,63 @@
     <a:masterClrMapping/>
   </p:clrMapOvr>
 </p:sld>
+</file>
+
+<file path=ppt/theme/theme1.xml><?xml version="1.0" encoding="utf-8"?>
+<a:theme xmlns:a="http://schemas.openxmlformats.org/drawingml/2006/main" name="CIS-FIN">
+  <a:themeElements>
+    <a:clrScheme name="CIS-FIN">
+      <a:dk1>
+        <a:srgbClr val="101820"/>
+      </a:dk1>
+      <a:lt1>
+        <a:srgbClr val="FFFFFF"/>
+      </a:lt1>
+      <a:dk2>
+        <a:srgbClr val="203040"/>
+      </a:dk2>
+      <a:lt2>
+        <a:srgbClr val="E5ECF4"/>
+      </a:lt2>
+      <a:accent1>
+        <a:srgbClr val="4F9DFF"/>
+      </a:accent1>
+      <a:accent2>
+        <a:srgbClr val="8FD3C7"/>
+      </a:accent2>
+      <a:accent3>
+        <a:srgbClr val="F2B134"/>
+      </a:accent3>
+      <a:accent4>
+        <a:srgbClr val="E06C75"/>
+      </a:accent4>
+      <a:accent5>
+        <a:srgbClr val="B48EAD"/>
+      </a:accent5>
+      <a:accent6>
+        <a:srgbClr val="98C379"/>
+      </a:accent6>
+      <a:hlink>
+        <a:srgbClr val="4F9DFF"/>
+      </a:hlink>
+      <a:folHlink>
+        <a:srgbClr val="B48EAD"/>
+      </a:folHlink>
+    </a:clrScheme>
+    <a:fontScheme name="CIS-FIN">
+      <a:majorFont>
+        <a:latin typeface="Aptos Display"/>
+      </a:majorFont>
+      <a:minorFont>
+        <a:latin typeface="Aptos"/>
+      </a:minorFont>
+    </a:fontScheme>
+    <a:fmtScheme name="CIS-FIN">
+      <a:fillStyleLst/>
+      <a:lnStyleLst/>
+      <a:effectStyleLst/>
+      <a:bgFillStyleLst/>
+    </a:fmtScheme>
+  </a:themeElements>
+</a:theme>
 </file>